--- a/presentations/group/animations/CoherentPhasors.pptx
+++ b/presentations/group/animations/CoherentPhasors.pptx
@@ -3168,7 +3168,7 @@
       <p:grpSpPr/>
       <p:pic>
         <p:nvPicPr>
-          <p:cNvPr id="2" name="637641fad7e6384d97065333073eef3e4b247d0d539da4565d48874bd30869cc.mp4">
+          <p:cNvPr id="2" name="5aa89bf7e7f57b4c6f24975cc775374f35360aef666a4078ba76feb173cd8f81.mp4">
             <a:hlinkClick r:id="" action="ppaction://media"/>
           </p:cNvPr>
           <p:cNvPicPr>
@@ -3241,7 +3241,7 @@
       <p:grpSpPr/>
       <p:pic>
         <p:nvPicPr>
-          <p:cNvPr id="2" name="b4a905e46149ffbe3fbfcb3971fdec95f788c97c769b2065ecf9f15398a4e468.mp4">
+          <p:cNvPr id="2" name="c0fc302e2f4f0816b024f10e050210ac56cd3d6b275d4431a59e4e5c33889d3c.mp4">
             <a:hlinkClick r:id="" action="ppaction://media"/>
           </p:cNvPr>
           <p:cNvPicPr>
@@ -3314,7 +3314,7 @@
       <p:grpSpPr/>
       <p:pic>
         <p:nvPicPr>
-          <p:cNvPr id="2" name="fc1276678d0e797bfc09abd9d6cc3e151a3a65e22f341cfc6a4265cabcefeded.mp4">
+          <p:cNvPr id="2" name="8ec8e73875f4502fa6398f6c095c5300218d08bf49331c2bc1aeadcf5e87e016.mp4">
             <a:hlinkClick r:id="" action="ppaction://media"/>
           </p:cNvPr>
           <p:cNvPicPr>
@@ -3387,7 +3387,7 @@
       <p:grpSpPr/>
       <p:pic>
         <p:nvPicPr>
-          <p:cNvPr id="2" name="7fb7641a7407a5e71f88882c1a863dcfef3ab3b2e101c482774ff8a9c4c061fb.mp4">
+          <p:cNvPr id="2" name="b32775ceb47050e18b3b4d5bc212d30fe9c9c4e9747b46642cb993eed9c75682.mp4">
             <a:hlinkClick r:id="" action="ppaction://media"/>
           </p:cNvPr>
           <p:cNvPicPr>
@@ -3460,7 +3460,7 @@
       <p:grpSpPr/>
       <p:pic>
         <p:nvPicPr>
-          <p:cNvPr id="2" name="47d97997d438830ec667f3184382e1474d7d719bc91931e3e92b8fdc44061cef.mp4">
+          <p:cNvPr id="2" name="eed1d234f5adcb0745a091d9140091438916367bc6a63ab80f43ebee471631e3.mp4">
             <a:hlinkClick r:id="" action="ppaction://media"/>
           </p:cNvPr>
           <p:cNvPicPr>
